--- a/assets/powerpoints/module-achat/A2-un-et-pain.pptx
+++ b/assets/powerpoints/module-achat/A2-un-et-pain.pptx
@@ -8871,7 +8871,43 @@
                 </a:solidFill>
                 <a:latin typeface="Verdana"/>
               </a:rPr>
-              <a:t>Le son de « un » ne s'écrit que &lt;b&gt;un&lt;/b&gt; ou &lt;b&gt;um&lt;/b&gt; : un, brun, lundi, chacun, aucun, parfum. Tout le reste se dit comme « pain ». C'est une des rares règles d'orthographe française sans exception utile.</a:t>
+              <a:t>Le son de « un » ne s'écrit que </a:t>
+            </a:r>
+            <a:r>
+              <a:rPr sz="2000" b="1" i="0">
+                <a:solidFill>
+                  <a:srgbClr val="4B4F52"/>
+                </a:solidFill>
+                <a:latin typeface="Verdana"/>
+              </a:rPr>
+              <a:t>un</a:t>
+            </a:r>
+            <a:r>
+              <a:rPr sz="2000" b="0" i="0">
+                <a:solidFill>
+                  <a:srgbClr val="4B4F52"/>
+                </a:solidFill>
+                <a:latin typeface="Verdana"/>
+              </a:rPr>
+              <a:t> ou </a:t>
+            </a:r>
+            <a:r>
+              <a:rPr sz="2000" b="1" i="0">
+                <a:solidFill>
+                  <a:srgbClr val="4B4F52"/>
+                </a:solidFill>
+                <a:latin typeface="Verdana"/>
+              </a:rPr>
+              <a:t>um</a:t>
+            </a:r>
+            <a:r>
+              <a:rPr sz="2000" b="0" i="0">
+                <a:solidFill>
+                  <a:srgbClr val="4B4F52"/>
+                </a:solidFill>
+                <a:latin typeface="Verdana"/>
+              </a:rPr>
+              <a:t> : un, brun, lundi, chacun, aucun, parfum. Tout le reste se dit comme « pain ». C'est une des rares règles d'orthographe française sans exception utile.</a:t>
             </a:r>
           </a:p>
         </p:txBody>
@@ -9459,7 +9495,25 @@
                 </a:solidFill>
                 <a:latin typeface="Verdana"/>
               </a:rPr>
-              <a:t>Plus rares, mais ils s'écrivent avec &lt;b&gt;um&lt;/b&gt; — d'où le son.</a:t>
+              <a:t>Plus rares, mais ils s'écrivent avec </a:t>
+            </a:r>
+            <a:r>
+              <a:rPr sz="1800" b="1" i="0">
+                <a:solidFill>
+                  <a:srgbClr val="3A3D40"/>
+                </a:solidFill>
+                <a:latin typeface="Verdana"/>
+              </a:rPr>
+              <a:t>um</a:t>
+            </a:r>
+            <a:r>
+              <a:rPr sz="1800" b="0" i="0">
+                <a:solidFill>
+                  <a:srgbClr val="3A3D40"/>
+                </a:solidFill>
+                <a:latin typeface="Verdana"/>
+              </a:rPr>
+              <a:t> — d'où le son.</a:t>
             </a:r>
           </a:p>
         </p:txBody>
